--- a/curriculum/M02/W08/L02/slides.pptx
+++ b/curriculum/M02/W08/L02/slides.pptx
@@ -4882,11 +4882,40 @@
                 <a:ea typeface="Malgun Gothic"/>
                 <a:cs typeface="Malgun Gothic"/>
               </a:rPr>
-              <a:t>를 만든다. 산화 경로 마지막 반응의 역방향이다. 2. </a:t>
-            </a:r>
+              <a:t>를 만든다. 산화 경로 마지막 반응의 역방향이다.</a:t>
+            </a:r>
+          </a:p>
+          <a:p>
+            <a:pPr>
+              <a:spcAft>
+                <a:spcPts val="900"/>
+              </a:spcAft>
+            </a:pPr>
             <a:r>
               <a:rPr sz="1600" b="1" i="0">
                 <a:solidFill>
+                  <a:srgbClr val="F2B705"/>
+                </a:solidFill>
+                <a:latin typeface="Malgun Gothic"/>
+                <a:ea typeface="Malgun Gothic"/>
+                <a:cs typeface="Malgun Gothic"/>
+              </a:rPr>
+              <a:t>•  </a:t>
+            </a:r>
+            <a:r>
+              <a:rPr sz="1600" b="0" i="0">
+                <a:solidFill>
+                  <a:srgbClr val="11202B"/>
+                </a:solidFill>
+                <a:latin typeface="Malgun Gothic"/>
+                <a:ea typeface="Malgun Gothic"/>
+                <a:cs typeface="Malgun Gothic"/>
+              </a:rPr>
+              <a:t>2. </a:t>
+            </a:r>
+            <a:r>
+              <a:rPr sz="1600" b="1" i="0">
+                <a:solidFill>
                   <a:srgbClr val="11202B"/>
                 </a:solidFill>
                 <a:latin typeface="Malgun Gothic"/>
@@ -4939,6 +4968,24 @@
               </a:rPr>
               <a:t>이 반응이 rate-limiting step이다.</a:t>
             </a:r>
+          </a:p>
+          <a:p>
+            <a:pPr>
+              <a:spcAft>
+                <a:spcPts val="900"/>
+              </a:spcAft>
+            </a:pPr>
+            <a:r>
+              <a:rPr sz="1600" b="1" i="0">
+                <a:solidFill>
+                  <a:srgbClr val="F2B705"/>
+                </a:solidFill>
+                <a:latin typeface="Malgun Gothic"/>
+                <a:ea typeface="Malgun Gothic"/>
+                <a:cs typeface="Malgun Gothic"/>
+              </a:rPr>
+              <a:t>•  </a:t>
+            </a:r>
             <a:r>
               <a:rPr sz="1600" b="0" i="0">
                 <a:solidFill>
@@ -4948,7 +4995,7 @@
                 <a:ea typeface="Malgun Gothic"/>
                 <a:cs typeface="Malgun Gothic"/>
               </a:rPr>
-              <a:t> 3. </a:t>
+              <a:t>3. </a:t>
             </a:r>
             <a:r>
               <a:rPr sz="1600" b="1" i="0">
@@ -4992,7 +5039,36 @@
                 <a:ea typeface="Malgun Gothic"/>
                 <a:cs typeface="Malgun Gothic"/>
               </a:rPr>
-              <a:t>와 acetyl-CoA를 내놓는다. 2단계에서 더한 acetyl-CoA가 여기서 돌아온다. 4. </a:t>
+              <a:t>와 acetyl-CoA를 내놓는다. 2단계에서 더한 acetyl-CoA가 여기서 돌아온다.</a:t>
+            </a:r>
+          </a:p>
+          <a:p>
+            <a:pPr>
+              <a:spcAft>
+                <a:spcPts val="900"/>
+              </a:spcAft>
+            </a:pPr>
+            <a:r>
+              <a:rPr sz="1600" b="1" i="0">
+                <a:solidFill>
+                  <a:srgbClr val="F2B705"/>
+                </a:solidFill>
+                <a:latin typeface="Malgun Gothic"/>
+                <a:ea typeface="Malgun Gothic"/>
+                <a:cs typeface="Malgun Gothic"/>
+              </a:rPr>
+              <a:t>•  </a:t>
+            </a:r>
+            <a:r>
+              <a:rPr sz="1600" b="0" i="0">
+                <a:solidFill>
+                  <a:srgbClr val="11202B"/>
+                </a:solidFill>
+                <a:latin typeface="Malgun Gothic"/>
+                <a:ea typeface="Malgun Gothic"/>
+                <a:cs typeface="Malgun Gothic"/>
+              </a:rPr>
+              <a:t>4. </a:t>
             </a:r>
             <a:r>
               <a:rPr sz="1600" b="1" i="0">
@@ -7621,11 +7697,40 @@
                 <a:ea typeface="Malgun Gothic"/>
                 <a:cs typeface="Malgun Gothic"/>
               </a:rPr>
-              <a:t>로 산화한다. 2. </a:t>
-            </a:r>
+              <a:t>로 산화한다.</a:t>
+            </a:r>
+          </a:p>
+          <a:p>
+            <a:pPr>
+              <a:spcAft>
+                <a:spcPts val="900"/>
+              </a:spcAft>
+            </a:pPr>
             <a:r>
               <a:rPr sz="1800" b="1" i="0">
                 <a:solidFill>
+                  <a:srgbClr val="F2B705"/>
+                </a:solidFill>
+                <a:latin typeface="Malgun Gothic"/>
+                <a:ea typeface="Malgun Gothic"/>
+                <a:cs typeface="Malgun Gothic"/>
+              </a:rPr>
+              <a:t>•  </a:t>
+            </a:r>
+            <a:r>
+              <a:rPr sz="1800" b="0" i="0">
+                <a:solidFill>
+                  <a:srgbClr val="11202B"/>
+                </a:solidFill>
+                <a:latin typeface="Malgun Gothic"/>
+                <a:ea typeface="Malgun Gothic"/>
+                <a:cs typeface="Malgun Gothic"/>
+              </a:rPr>
+              <a:t>2. </a:t>
+            </a:r>
+            <a:r>
+              <a:rPr sz="1800" b="1" i="0">
+                <a:solidFill>
                   <a:srgbClr val="11202B"/>
                 </a:solidFill>
                 <a:latin typeface="Malgun Gothic"/>
@@ -7665,7 +7770,36 @@
                 <a:ea typeface="Malgun Gothic"/>
                 <a:cs typeface="Malgun Gothic"/>
               </a:rPr>
-              <a:t> acetoacetate에 붙여 acetoacetyl-CoA를 만든다. ATP를 쓰지 않는다. 3. </a:t>
+              <a:t> acetoacetate에 붙여 acetoacetyl-CoA를 만든다. ATP를 쓰지 않는다.</a:t>
+            </a:r>
+          </a:p>
+          <a:p>
+            <a:pPr>
+              <a:spcAft>
+                <a:spcPts val="900"/>
+              </a:spcAft>
+            </a:pPr>
+            <a:r>
+              <a:rPr sz="1800" b="1" i="0">
+                <a:solidFill>
+                  <a:srgbClr val="F2B705"/>
+                </a:solidFill>
+                <a:latin typeface="Malgun Gothic"/>
+                <a:ea typeface="Malgun Gothic"/>
+                <a:cs typeface="Malgun Gothic"/>
+              </a:rPr>
+              <a:t>•  </a:t>
+            </a:r>
+            <a:r>
+              <a:rPr sz="1800" b="0" i="0">
+                <a:solidFill>
+                  <a:srgbClr val="11202B"/>
+                </a:solidFill>
+                <a:latin typeface="Malgun Gothic"/>
+                <a:ea typeface="Malgun Gothic"/>
+                <a:cs typeface="Malgun Gothic"/>
+              </a:rPr>
+              <a:t>3. </a:t>
             </a:r>
             <a:r>
               <a:rPr sz="1800" b="1" i="0">
@@ -10889,29 +11023,7 @@
                 <a:ea typeface="Malgun Gothic"/>
                 <a:cs typeface="Malgun Gothic"/>
               </a:rPr>
-              <a:t>1. Insulin이 없으면 HSL 억제가 풀려 지방 분해가 최대로 진행되고 유리지방산이 간으로 쏟아져 들어온다. 2. Glucagon이 올라가 malonyl-CoA가 낮게 유지되므로 CPT-I이 열린 상태로 고정된다. 지방산 산화가 멈추지 않는다. 3. 동시에 gluconeogenesis가 억제되지 않아 </a:t>
-            </a:r>
-            <a:r>
-              <a:rPr sz="1400" b="1" i="0">
-                <a:solidFill>
-                  <a:srgbClr val="11202B"/>
-                </a:solidFill>
-                <a:latin typeface="Malgun Gothic"/>
-                <a:ea typeface="Malgun Gothic"/>
-                <a:cs typeface="Malgun Gothic"/>
-              </a:rPr>
-              <a:t>고혈당</a:t>
-            </a:r>
-            <a:r>
-              <a:rPr sz="1400" b="0" i="0">
-                <a:solidFill>
-                  <a:srgbClr val="11202B"/>
-                </a:solidFill>
-                <a:latin typeface="Malgun Gothic"/>
-                <a:ea typeface="Malgun Gothic"/>
-                <a:cs typeface="Malgun Gothic"/>
-              </a:rPr>
-              <a:t>이 함께 나타난다. 흔히 250 mg/dL(13.9 mmol/L) 이상이다. 4. Acetyl-CoA 과잉과 oxaloacetate 소모가 겹쳐 ketogenesis가 폭주한다. 총 케톤체가 15 mmol/L을 넘는 경우가 흔하다.</a:t>
+              <a:t>1. Insulin이 없으면 HSL 억제가 풀려 지방 분해가 최대로 진행되고 유리지방산이 간으로 쏟아져 들어온다.</a:t>
             </a:r>
           </a:p>
           <a:p>
@@ -10932,17 +11044,6 @@
               <a:t>•  </a:t>
             </a:r>
             <a:r>
-              <a:rPr sz="1400" b="1" i="0">
-                <a:solidFill>
-                  <a:srgbClr val="11202B"/>
-                </a:solidFill>
-                <a:latin typeface="Malgun Gothic"/>
-                <a:ea typeface="Malgun Gothic"/>
-                <a:cs typeface="Malgun Gothic"/>
-              </a:rPr>
-              <a:t>진단 기준</a:t>
-            </a:r>
-            <a:r>
               <a:rPr sz="1400" b="0" i="0">
                 <a:solidFill>
                   <a:srgbClr val="11202B"/>
@@ -10951,51 +11052,7 @@
                 <a:ea typeface="Malgun Gothic"/>
                 <a:cs typeface="Malgun Gothic"/>
               </a:rPr>
-              <a:t>은 세 요소의 조합이다. 고혈당(보통 250 mg/dL 이상), </a:t>
-            </a:r>
-            <a:r>
-              <a:rPr sz="1400" b="1" i="0">
-                <a:solidFill>
-                  <a:srgbClr val="11202B"/>
-                </a:solidFill>
-                <a:latin typeface="Malgun Gothic"/>
-                <a:ea typeface="Malgun Gothic"/>
-                <a:cs typeface="Malgun Gothic"/>
-              </a:rPr>
-              <a:t>혈중 beta-hydroxybutyrate 3.0 mmol/L 이상 또는 케톤 검사 강양성</a:t>
-            </a:r>
-            <a:r>
-              <a:rPr sz="1400" b="0" i="0">
-                <a:solidFill>
-                  <a:srgbClr val="11202B"/>
-                </a:solidFill>
-                <a:latin typeface="Malgun Gothic"/>
-                <a:ea typeface="Malgun Gothic"/>
-                <a:cs typeface="Malgun Gothic"/>
-              </a:rPr>
-              <a:t>, 그리고 </a:t>
-            </a:r>
-            <a:r>
-              <a:rPr sz="1400" b="1" i="0">
-                <a:solidFill>
-                  <a:srgbClr val="11202B"/>
-                </a:solidFill>
-                <a:latin typeface="Malgun Gothic"/>
-                <a:ea typeface="Malgun Gothic"/>
-                <a:cs typeface="Malgun Gothic"/>
-              </a:rPr>
-              <a:t>anion gap이 증가한 대사성 산증</a:t>
-            </a:r>
-            <a:r>
-              <a:rPr sz="1400" b="0" i="0">
-                <a:solidFill>
-                  <a:srgbClr val="11202B"/>
-                </a:solidFill>
-                <a:latin typeface="Malgun Gothic"/>
-                <a:ea typeface="Malgun Gothic"/>
-                <a:cs typeface="Malgun Gothic"/>
-              </a:rPr>
-              <a:t>(정맥 pH 7.3 미만, bicarbonate 18 mmol/L 미만)이다.</a:t>
+              <a:t>2. Glucagon이 올라가 malonyl-CoA가 낮게 유지되므로 CPT-I이 열린 상태로 고정된다. 지방산 산화가 멈추지 않는다.</a:t>
             </a:r>
           </a:p>
           <a:p>
@@ -11024,6 +11081,170 @@
                 <a:ea typeface="Malgun Gothic"/>
                 <a:cs typeface="Malgun Gothic"/>
               </a:rPr>
+              <a:t>3. 동시에 gluconeogenesis가 억제되지 않아 </a:t>
+            </a:r>
+            <a:r>
+              <a:rPr sz="1400" b="1" i="0">
+                <a:solidFill>
+                  <a:srgbClr val="11202B"/>
+                </a:solidFill>
+                <a:latin typeface="Malgun Gothic"/>
+                <a:ea typeface="Malgun Gothic"/>
+                <a:cs typeface="Malgun Gothic"/>
+              </a:rPr>
+              <a:t>고혈당</a:t>
+            </a:r>
+            <a:r>
+              <a:rPr sz="1400" b="0" i="0">
+                <a:solidFill>
+                  <a:srgbClr val="11202B"/>
+                </a:solidFill>
+                <a:latin typeface="Malgun Gothic"/>
+                <a:ea typeface="Malgun Gothic"/>
+                <a:cs typeface="Malgun Gothic"/>
+              </a:rPr>
+              <a:t>이 함께 나타난다. 흔히 250 mg/dL(13.9 mmol/L) 이상이다.</a:t>
+            </a:r>
+          </a:p>
+          <a:p>
+            <a:pPr>
+              <a:spcAft>
+                <a:spcPts val="900"/>
+              </a:spcAft>
+            </a:pPr>
+            <a:r>
+              <a:rPr sz="1400" b="1" i="0">
+                <a:solidFill>
+                  <a:srgbClr val="F2B705"/>
+                </a:solidFill>
+                <a:latin typeface="Malgun Gothic"/>
+                <a:ea typeface="Malgun Gothic"/>
+                <a:cs typeface="Malgun Gothic"/>
+              </a:rPr>
+              <a:t>•  </a:t>
+            </a:r>
+            <a:r>
+              <a:rPr sz="1400" b="0" i="0">
+                <a:solidFill>
+                  <a:srgbClr val="11202B"/>
+                </a:solidFill>
+                <a:latin typeface="Malgun Gothic"/>
+                <a:ea typeface="Malgun Gothic"/>
+                <a:cs typeface="Malgun Gothic"/>
+              </a:rPr>
+              <a:t>4. Acetyl-CoA 과잉과 oxaloacetate 소모가 겹쳐 ketogenesis가 폭주한다. 총 케톤체가 15 mmol/L을 넘는 경우가 흔하다.</a:t>
+            </a:r>
+          </a:p>
+          <a:p>
+            <a:pPr>
+              <a:spcAft>
+                <a:spcPts val="900"/>
+              </a:spcAft>
+            </a:pPr>
+            <a:r>
+              <a:rPr sz="1400" b="1" i="0">
+                <a:solidFill>
+                  <a:srgbClr val="F2B705"/>
+                </a:solidFill>
+                <a:latin typeface="Malgun Gothic"/>
+                <a:ea typeface="Malgun Gothic"/>
+                <a:cs typeface="Malgun Gothic"/>
+              </a:rPr>
+              <a:t>•  </a:t>
+            </a:r>
+            <a:r>
+              <a:rPr sz="1400" b="1" i="0">
+                <a:solidFill>
+                  <a:srgbClr val="11202B"/>
+                </a:solidFill>
+                <a:latin typeface="Malgun Gothic"/>
+                <a:ea typeface="Malgun Gothic"/>
+                <a:cs typeface="Malgun Gothic"/>
+              </a:rPr>
+              <a:t>진단 기준</a:t>
+            </a:r>
+            <a:r>
+              <a:rPr sz="1400" b="0" i="0">
+                <a:solidFill>
+                  <a:srgbClr val="11202B"/>
+                </a:solidFill>
+                <a:latin typeface="Malgun Gothic"/>
+                <a:ea typeface="Malgun Gothic"/>
+                <a:cs typeface="Malgun Gothic"/>
+              </a:rPr>
+              <a:t>은 세 요소의 조합이다. 고혈당(보통 250 mg/dL 이상), </a:t>
+            </a:r>
+            <a:r>
+              <a:rPr sz="1400" b="1" i="0">
+                <a:solidFill>
+                  <a:srgbClr val="11202B"/>
+                </a:solidFill>
+                <a:latin typeface="Malgun Gothic"/>
+                <a:ea typeface="Malgun Gothic"/>
+                <a:cs typeface="Malgun Gothic"/>
+              </a:rPr>
+              <a:t>혈중 beta-hydroxybutyrate 3.0 mmol/L 이상 또는 케톤 검사 강양성</a:t>
+            </a:r>
+            <a:r>
+              <a:rPr sz="1400" b="0" i="0">
+                <a:solidFill>
+                  <a:srgbClr val="11202B"/>
+                </a:solidFill>
+                <a:latin typeface="Malgun Gothic"/>
+                <a:ea typeface="Malgun Gothic"/>
+                <a:cs typeface="Malgun Gothic"/>
+              </a:rPr>
+              <a:t>, 그리고 </a:t>
+            </a:r>
+            <a:r>
+              <a:rPr sz="1400" b="1" i="0">
+                <a:solidFill>
+                  <a:srgbClr val="11202B"/>
+                </a:solidFill>
+                <a:latin typeface="Malgun Gothic"/>
+                <a:ea typeface="Malgun Gothic"/>
+                <a:cs typeface="Malgun Gothic"/>
+              </a:rPr>
+              <a:t>anion gap이 증가한 대사성 산증</a:t>
+            </a:r>
+            <a:r>
+              <a:rPr sz="1400" b="0" i="0">
+                <a:solidFill>
+                  <a:srgbClr val="11202B"/>
+                </a:solidFill>
+                <a:latin typeface="Malgun Gothic"/>
+                <a:ea typeface="Malgun Gothic"/>
+                <a:cs typeface="Malgun Gothic"/>
+              </a:rPr>
+              <a:t>(정맥 pH 7.3 미만, bicarbonate 18 mmol/L 미만)이다.</a:t>
+            </a:r>
+          </a:p>
+          <a:p>
+            <a:pPr>
+              <a:spcAft>
+                <a:spcPts val="900"/>
+              </a:spcAft>
+            </a:pPr>
+            <a:r>
+              <a:rPr sz="1400" b="1" i="0">
+                <a:solidFill>
+                  <a:srgbClr val="F2B705"/>
+                </a:solidFill>
+                <a:latin typeface="Malgun Gothic"/>
+                <a:ea typeface="Malgun Gothic"/>
+                <a:cs typeface="Malgun Gothic"/>
+              </a:rPr>
+              <a:t>•  </a:t>
+            </a:r>
+            <a:r>
+              <a:rPr sz="1400" b="0" i="0">
+                <a:solidFill>
+                  <a:srgbClr val="11202B"/>
+                </a:solidFill>
+                <a:latin typeface="Malgun Gothic"/>
+                <a:ea typeface="Malgun Gothic"/>
+                <a:cs typeface="Malgun Gothic"/>
+              </a:rPr>
               <a:t>고혈당과 케톤체의 삼투성 소실로 </a:t>
             </a:r>
             <a:r>
@@ -11047,6 +11268,68 @@
                 <a:cs typeface="Malgun Gothic"/>
               </a:rPr>
               <a:t>가 심하다. 성인 환자의 평균 수분 결손은 5~7 L 수준이고, 이 탈수가 신기능을 떨어뜨려 산증을 더 악화시킨다.</a:t>
+            </a:r>
+          </a:p>
+          <a:p>
+            <a:pPr>
+              <a:spcAft>
+                <a:spcPts val="900"/>
+              </a:spcAft>
+            </a:pPr>
+            <a:r>
+              <a:rPr sz="1400" b="1" i="0">
+                <a:solidFill>
+                  <a:srgbClr val="F2B705"/>
+                </a:solidFill>
+                <a:latin typeface="Malgun Gothic"/>
+                <a:ea typeface="Malgun Gothic"/>
+                <a:cs typeface="Malgun Gothic"/>
+              </a:rPr>
+              <a:t>•  </a:t>
+            </a:r>
+            <a:r>
+              <a:rPr sz="1400" b="1" i="0">
+                <a:solidFill>
+                  <a:srgbClr val="11202B"/>
+                </a:solidFill>
+                <a:latin typeface="Malgun Gothic"/>
+                <a:ea typeface="Malgun Gothic"/>
+                <a:cs typeface="Malgun Gothic"/>
+              </a:rPr>
+              <a:t>Potassium의 함정</a:t>
+            </a:r>
+            <a:r>
+              <a:rPr sz="1400" b="0" i="0">
+                <a:solidFill>
+                  <a:srgbClr val="11202B"/>
+                </a:solidFill>
+                <a:latin typeface="Malgun Gothic"/>
+                <a:ea typeface="Malgun Gothic"/>
+                <a:cs typeface="Malgun Gothic"/>
+              </a:rPr>
+              <a:t>이 임상에서 가장 중요하다. 산증과 insulin 부족으로 potassium이 세포 밖으로 나오므로 측정된 혈중 potassium은 정상이나 높게 나타난다. 그러나 소변으로 대량 소실되어 </a:t>
+            </a:r>
+            <a:r>
+              <a:rPr sz="1400" b="1" i="0">
+                <a:solidFill>
+                  <a:srgbClr val="11202B"/>
+                </a:solidFill>
+                <a:latin typeface="Malgun Gothic"/>
+                <a:ea typeface="Malgun Gothic"/>
+                <a:cs typeface="Malgun Gothic"/>
+              </a:rPr>
+              <a:t>전신 총 potassium은 심하게 부족</a:t>
+            </a:r>
+            <a:r>
+              <a:rPr sz="1400" b="0" i="0">
+                <a:solidFill>
+                  <a:srgbClr val="11202B"/>
+                </a:solidFill>
+                <a:latin typeface="Malgun Gothic"/>
+                <a:ea typeface="Malgun Gothic"/>
+                <a:cs typeface="Malgun Gothic"/>
+              </a:rPr>
+              <a:t>하다. Insulin을 투여하면 potassium이 세포 안으로 들어가 혈중 농도가 급격히 떨어져 치명적 부정맥을 일으킬 수 있다.</a:t>
             </a:r>
           </a:p>
         </p:txBody>
@@ -11323,7 +11606,7 @@
               </a:spcAft>
             </a:pPr>
             <a:r>
-              <a:rPr sz="1400" b="1" i="0">
+              <a:rPr sz="1800" b="1" i="0">
                 <a:solidFill>
                   <a:srgbClr val="F2B705"/>
                 </a:solidFill>
@@ -11334,48 +11617,15 @@
               <a:t>•  </a:t>
             </a:r>
             <a:r>
-              <a:rPr sz="1400" b="1" i="0">
-                <a:solidFill>
-                  <a:srgbClr val="11202B"/>
-                </a:solidFill>
-                <a:latin typeface="Malgun Gothic"/>
-                <a:ea typeface="Malgun Gothic"/>
-                <a:cs typeface="Malgun Gothic"/>
-              </a:rPr>
-              <a:t>Potassium의 함정</a:t>
-            </a:r>
-            <a:r>
-              <a:rPr sz="1400" b="0" i="0">
-                <a:solidFill>
-                  <a:srgbClr val="11202B"/>
-                </a:solidFill>
-                <a:latin typeface="Malgun Gothic"/>
-                <a:ea typeface="Malgun Gothic"/>
-                <a:cs typeface="Malgun Gothic"/>
-              </a:rPr>
-              <a:t>이 임상에서 가장 중요하다. 산증과 insulin 부족으로 potassium이 세포 밖으로 나오므로 측정된 혈중 potassium은 정상이나 높게 나타난다. 그러나 소변으로 대량 소실되어 </a:t>
-            </a:r>
-            <a:r>
-              <a:rPr sz="1400" b="1" i="0">
-                <a:solidFill>
-                  <a:srgbClr val="11202B"/>
-                </a:solidFill>
-                <a:latin typeface="Malgun Gothic"/>
-                <a:ea typeface="Malgun Gothic"/>
-                <a:cs typeface="Malgun Gothic"/>
-              </a:rPr>
-              <a:t>전신 총 potassium은 심하게 부족</a:t>
-            </a:r>
-            <a:r>
-              <a:rPr sz="1400" b="0" i="0">
-                <a:solidFill>
-                  <a:srgbClr val="11202B"/>
-                </a:solidFill>
-                <a:latin typeface="Malgun Gothic"/>
-                <a:ea typeface="Malgun Gothic"/>
-                <a:cs typeface="Malgun Gothic"/>
-              </a:rPr>
-              <a:t>하다. Insulin을 투여하면 potassium이 세포 안으로 들어가 혈중 농도가 급격히 떨어져 치명적 부정맥을 일으킬 수 있다.</a:t>
+              <a:rPr sz="1800" b="0" i="0">
+                <a:solidFill>
+                  <a:srgbClr val="11202B"/>
+                </a:solidFill>
+                <a:latin typeface="Malgun Gothic"/>
+                <a:ea typeface="Malgun Gothic"/>
+                <a:cs typeface="Malgun Gothic"/>
+              </a:rPr>
+              <a:t>치료 순서가 이 병태생리에서 나온다.</a:t>
             </a:r>
           </a:p>
           <a:p>
@@ -11385,7 +11635,7 @@
               </a:spcAft>
             </a:pPr>
             <a:r>
-              <a:rPr sz="1400" b="1" i="0">
+              <a:rPr sz="1800" b="1" i="0">
                 <a:solidFill>
                   <a:srgbClr val="F2B705"/>
                 </a:solidFill>
@@ -11396,15 +11646,37 @@
               <a:t>•  </a:t>
             </a:r>
             <a:r>
-              <a:rPr sz="1400" b="0" i="0">
-                <a:solidFill>
-                  <a:srgbClr val="11202B"/>
-                </a:solidFill>
-                <a:latin typeface="Malgun Gothic"/>
-                <a:ea typeface="Malgun Gothic"/>
-                <a:cs typeface="Malgun Gothic"/>
-              </a:rPr>
-              <a:t>치료 순서가 이 병태생리에서 나온다.</a:t>
+              <a:rPr sz="1800" b="0" i="0">
+                <a:solidFill>
+                  <a:srgbClr val="11202B"/>
+                </a:solidFill>
+                <a:latin typeface="Malgun Gothic"/>
+                <a:ea typeface="Malgun Gothic"/>
+                <a:cs typeface="Malgun Gothic"/>
+              </a:rPr>
+              <a:t>1. </a:t>
+            </a:r>
+            <a:r>
+              <a:rPr sz="1800" b="1" i="0">
+                <a:solidFill>
+                  <a:srgbClr val="11202B"/>
+                </a:solidFill>
+                <a:latin typeface="Malgun Gothic"/>
+                <a:ea typeface="Malgun Gothic"/>
+                <a:cs typeface="Malgun Gothic"/>
+              </a:rPr>
+              <a:t>수분과 전해질</a:t>
+            </a:r>
+            <a:r>
+              <a:rPr sz="1800" b="0" i="0">
+                <a:solidFill>
+                  <a:srgbClr val="11202B"/>
+                </a:solidFill>
+                <a:latin typeface="Malgun Gothic"/>
+                <a:ea typeface="Malgun Gothic"/>
+                <a:cs typeface="Malgun Gothic"/>
+              </a:rPr>
+              <a:t>을 먼저 보충한다. 생리식염수로 순환 혈액량을 회복한다.</a:t>
             </a:r>
           </a:p>
           <a:p>
@@ -11414,7 +11686,7 @@
               </a:spcAft>
             </a:pPr>
             <a:r>
-              <a:rPr sz="1400" b="1" i="0">
+              <a:rPr sz="1800" b="1" i="0">
                 <a:solidFill>
                   <a:srgbClr val="F2B705"/>
                 </a:solidFill>
@@ -11425,40 +11697,18 @@
               <a:t>•  </a:t>
             </a:r>
             <a:r>
-              <a:rPr sz="1400" b="0" i="0">
-                <a:solidFill>
-                  <a:srgbClr val="11202B"/>
-                </a:solidFill>
-                <a:latin typeface="Malgun Gothic"/>
-                <a:ea typeface="Malgun Gothic"/>
-                <a:cs typeface="Malgun Gothic"/>
-              </a:rPr>
-              <a:t>1. </a:t>
-            </a:r>
-            <a:r>
-              <a:rPr sz="1400" b="1" i="0">
-                <a:solidFill>
-                  <a:srgbClr val="11202B"/>
-                </a:solidFill>
-                <a:latin typeface="Malgun Gothic"/>
-                <a:ea typeface="Malgun Gothic"/>
-                <a:cs typeface="Malgun Gothic"/>
-              </a:rPr>
-              <a:t>수분과 전해질</a:t>
-            </a:r>
-            <a:r>
-              <a:rPr sz="1400" b="0" i="0">
-                <a:solidFill>
-                  <a:srgbClr val="11202B"/>
-                </a:solidFill>
-                <a:latin typeface="Malgun Gothic"/>
-                <a:ea typeface="Malgun Gothic"/>
-                <a:cs typeface="Malgun Gothic"/>
-              </a:rPr>
-              <a:t>을 먼저 보충한다. 생리식염수로 순환 혈액량을 회복한다. 2. </a:t>
-            </a:r>
-            <a:r>
-              <a:rPr sz="1400" b="1" i="0">
+              <a:rPr sz="1800" b="0" i="0">
+                <a:solidFill>
+                  <a:srgbClr val="11202B"/>
+                </a:solidFill>
+                <a:latin typeface="Malgun Gothic"/>
+                <a:ea typeface="Malgun Gothic"/>
+                <a:cs typeface="Malgun Gothic"/>
+              </a:rPr>
+              <a:t>2. </a:t>
+            </a:r>
+            <a:r>
+              <a:rPr sz="1800" b="1" i="0">
                 <a:solidFill>
                   <a:srgbClr val="11202B"/>
                 </a:solidFill>
@@ -11469,18 +11719,47 @@
               <a:t>Insulin</a:t>
             </a:r>
             <a:r>
-              <a:rPr sz="1400" b="0" i="0">
-                <a:solidFill>
-                  <a:srgbClr val="11202B"/>
-                </a:solidFill>
-                <a:latin typeface="Malgun Gothic"/>
-                <a:ea typeface="Malgun Gothic"/>
-                <a:cs typeface="Malgun Gothic"/>
-              </a:rPr>
-              <a:t>을 지속 정주한다. 지방 분해를 끄는 것이 치료의 본질이다. 고혈당 교정이 아니라 ketogenesis 차단이 목표다. 3. </a:t>
-            </a:r>
-            <a:r>
-              <a:rPr sz="1400" b="1" i="0">
+              <a:rPr sz="1800" b="0" i="0">
+                <a:solidFill>
+                  <a:srgbClr val="11202B"/>
+                </a:solidFill>
+                <a:latin typeface="Malgun Gothic"/>
+                <a:ea typeface="Malgun Gothic"/>
+                <a:cs typeface="Malgun Gothic"/>
+              </a:rPr>
+              <a:t>을 지속 정주한다. 지방 분해를 끄는 것이 치료의 본질이다. 고혈당 교정이 아니라 ketogenesis 차단이 목표다.</a:t>
+            </a:r>
+          </a:p>
+          <a:p>
+            <a:pPr>
+              <a:spcAft>
+                <a:spcPts val="900"/>
+              </a:spcAft>
+            </a:pPr>
+            <a:r>
+              <a:rPr sz="1800" b="1" i="0">
+                <a:solidFill>
+                  <a:srgbClr val="F2B705"/>
+                </a:solidFill>
+                <a:latin typeface="Malgun Gothic"/>
+                <a:ea typeface="Malgun Gothic"/>
+                <a:cs typeface="Malgun Gothic"/>
+              </a:rPr>
+              <a:t>•  </a:t>
+            </a:r>
+            <a:r>
+              <a:rPr sz="1800" b="0" i="0">
+                <a:solidFill>
+                  <a:srgbClr val="11202B"/>
+                </a:solidFill>
+                <a:latin typeface="Malgun Gothic"/>
+                <a:ea typeface="Malgun Gothic"/>
+                <a:cs typeface="Malgun Gothic"/>
+              </a:rPr>
+              <a:t>3. </a:t>
+            </a:r>
+            <a:r>
+              <a:rPr sz="1800" b="1" i="0">
                 <a:solidFill>
                   <a:srgbClr val="11202B"/>
                 </a:solidFill>
@@ -11491,18 +11770,47 @@
               <a:t>Potassium</a:t>
             </a:r>
             <a:r>
-              <a:rPr sz="1400" b="0" i="0">
-                <a:solidFill>
-                  <a:srgbClr val="11202B"/>
-                </a:solidFill>
-                <a:latin typeface="Malgun Gothic"/>
-                <a:ea typeface="Malgun Gothic"/>
-                <a:cs typeface="Malgun Gothic"/>
-              </a:rPr>
-              <a:t>을 보충한다. 혈중 농도가 5.2 mmol/L 미만이고 소변이 나오면 insulin과 함께 시작한다. 4. </a:t>
-            </a:r>
-            <a:r>
-              <a:rPr sz="1400" b="1" i="0">
+              <a:rPr sz="1800" b="0" i="0">
+                <a:solidFill>
+                  <a:srgbClr val="11202B"/>
+                </a:solidFill>
+                <a:latin typeface="Malgun Gothic"/>
+                <a:ea typeface="Malgun Gothic"/>
+                <a:cs typeface="Malgun Gothic"/>
+              </a:rPr>
+              <a:t>을 보충한다. 혈중 농도가 5.2 mmol/L 미만이고 소변이 나오면 insulin과 함께 시작한다.</a:t>
+            </a:r>
+          </a:p>
+          <a:p>
+            <a:pPr>
+              <a:spcAft>
+                <a:spcPts val="900"/>
+              </a:spcAft>
+            </a:pPr>
+            <a:r>
+              <a:rPr sz="1800" b="1" i="0">
+                <a:solidFill>
+                  <a:srgbClr val="F2B705"/>
+                </a:solidFill>
+                <a:latin typeface="Malgun Gothic"/>
+                <a:ea typeface="Malgun Gothic"/>
+                <a:cs typeface="Malgun Gothic"/>
+              </a:rPr>
+              <a:t>•  </a:t>
+            </a:r>
+            <a:r>
+              <a:rPr sz="1800" b="0" i="0">
+                <a:solidFill>
+                  <a:srgbClr val="11202B"/>
+                </a:solidFill>
+                <a:latin typeface="Malgun Gothic"/>
+                <a:ea typeface="Malgun Gothic"/>
+                <a:cs typeface="Malgun Gothic"/>
+              </a:rPr>
+              <a:t>4. </a:t>
+            </a:r>
+            <a:r>
+              <a:rPr sz="1800" b="1" i="0">
                 <a:solidFill>
                   <a:srgbClr val="11202B"/>
                 </a:solidFill>
@@ -11513,18 +11821,47 @@
               <a:t>Bicarbonate는 일반적으로 쓰지 않는다.</a:t>
             </a:r>
             <a:r>
-              <a:rPr sz="1400" b="0" i="0">
-                <a:solidFill>
-                  <a:srgbClr val="11202B"/>
-                </a:solidFill>
-                <a:latin typeface="Malgun Gothic"/>
-                <a:ea typeface="Malgun Gothic"/>
-                <a:cs typeface="Malgun Gothic"/>
-              </a:rPr>
-              <a:t> pH 6.9 미만의 극단적 경우에만 고려한다. Insulin으로 ketogenesis를 멈추면 축적된 케톤체가 산화되며 bicarbonate가 재생되기 때문이다. 5. 혈당이 200 mg/dL 수준으로 내려가도 </a:t>
-            </a:r>
-            <a:r>
-              <a:rPr sz="1400" b="1" i="0">
+              <a:rPr sz="1800" b="0" i="0">
+                <a:solidFill>
+                  <a:srgbClr val="11202B"/>
+                </a:solidFill>
+                <a:latin typeface="Malgun Gothic"/>
+                <a:ea typeface="Malgun Gothic"/>
+                <a:cs typeface="Malgun Gothic"/>
+              </a:rPr>
+              <a:t> pH 6.9 미만의 극단적 경우에만 고려한다. Insulin으로 ketogenesis를 멈추면 축적된 케톤체가 산화되며 bicarbonate가 재생되기 때문이다.</a:t>
+            </a:r>
+          </a:p>
+          <a:p>
+            <a:pPr>
+              <a:spcAft>
+                <a:spcPts val="900"/>
+              </a:spcAft>
+            </a:pPr>
+            <a:r>
+              <a:rPr sz="1800" b="1" i="0">
+                <a:solidFill>
+                  <a:srgbClr val="F2B705"/>
+                </a:solidFill>
+                <a:latin typeface="Malgun Gothic"/>
+                <a:ea typeface="Malgun Gothic"/>
+                <a:cs typeface="Malgun Gothic"/>
+              </a:rPr>
+              <a:t>•  </a:t>
+            </a:r>
+            <a:r>
+              <a:rPr sz="1800" b="0" i="0">
+                <a:solidFill>
+                  <a:srgbClr val="11202B"/>
+                </a:solidFill>
+                <a:latin typeface="Malgun Gothic"/>
+                <a:ea typeface="Malgun Gothic"/>
+                <a:cs typeface="Malgun Gothic"/>
+              </a:rPr>
+              <a:t>5. 혈당이 200 mg/dL 수준으로 내려가도 </a:t>
+            </a:r>
+            <a:r>
+              <a:rPr sz="1800" b="1" i="0">
                 <a:solidFill>
                   <a:srgbClr val="11202B"/>
                 </a:solidFill>
@@ -11535,7 +11872,7 @@
               <a:t>insulin을 중단하지 않고 포도당을 함께 투여</a:t>
             </a:r>
             <a:r>
-              <a:rPr sz="1400" b="0" i="0">
+              <a:rPr sz="1800" b="0" i="0">
                 <a:solidFill>
                   <a:srgbClr val="11202B"/>
                 </a:solidFill>
@@ -12402,6 +12739,86 @@
               <a:t> 양상이 나타나고, 구토로 인한 대사성 알칼리증이 섞여 산-염기 소견이 복잡해진다.</a:t>
             </a:r>
           </a:p>
+          <a:p>
+            <a:pPr>
+              <a:spcAft>
+                <a:spcPts val="900"/>
+              </a:spcAft>
+            </a:pPr>
+            <a:r>
+              <a:rPr sz="1400" b="1" i="0">
+                <a:solidFill>
+                  <a:srgbClr val="F2B705"/>
+                </a:solidFill>
+                <a:latin typeface="Malgun Gothic"/>
+                <a:ea typeface="Malgun Gothic"/>
+                <a:cs typeface="Malgun Gothic"/>
+              </a:rPr>
+              <a:t>•  </a:t>
+            </a:r>
+            <a:r>
+              <a:rPr sz="1400" b="0" i="0">
+                <a:solidFill>
+                  <a:srgbClr val="11202B"/>
+                </a:solidFill>
+                <a:latin typeface="Malgun Gothic"/>
+                <a:ea typeface="Malgun Gothic"/>
+                <a:cs typeface="Malgun Gothic"/>
+              </a:rPr>
+              <a:t>치료에서 </a:t>
+            </a:r>
+            <a:r>
+              <a:rPr sz="1400" b="1" i="0">
+                <a:solidFill>
+                  <a:srgbClr val="11202B"/>
+                </a:solidFill>
+                <a:latin typeface="Malgun Gothic"/>
+                <a:ea typeface="Malgun Gothic"/>
+                <a:cs typeface="Malgun Gothic"/>
+              </a:rPr>
+              <a:t>thiamine을 포도당보다 먼저 투여하는 것</a:t>
+            </a:r>
+            <a:r>
+              <a:rPr sz="1400" b="0" i="0">
+                <a:solidFill>
+                  <a:srgbClr val="11202B"/>
+                </a:solidFill>
+                <a:latin typeface="Malgun Gothic"/>
+                <a:ea typeface="Malgun Gothic"/>
+                <a:cs typeface="Malgun Gothic"/>
+              </a:rPr>
+              <a:t>이 원칙이다. Thiamine은 pyruvate dehydrogenase와 2-oxoglutarate dehydrogenase의 보조인자이며, 만성 알코올 사용 환자는 thiamine이 부족하다. 결핍 상태에서 포도당을 부하하면 Wernicke 뇌증을 유발할 수 있다. 이후 포도당과 생리식염수를 투여하면 insulin 분비가 올라가 지방 분해가 멈추고 ketosis가 해소된다.</a:t>
+            </a:r>
+          </a:p>
+          <a:p>
+            <a:pPr>
+              <a:spcAft>
+                <a:spcPts val="900"/>
+              </a:spcAft>
+            </a:pPr>
+            <a:r>
+              <a:rPr sz="1400" b="1" i="0">
+                <a:solidFill>
+                  <a:srgbClr val="F2B705"/>
+                </a:solidFill>
+                <a:latin typeface="Malgun Gothic"/>
+                <a:ea typeface="Malgun Gothic"/>
+                <a:cs typeface="Malgun Gothic"/>
+              </a:rPr>
+              <a:t>•  </a:t>
+            </a:r>
+            <a:r>
+              <a:rPr sz="1400" b="0" i="0">
+                <a:solidFill>
+                  <a:srgbClr val="11202B"/>
+                </a:solidFill>
+                <a:latin typeface="Malgun Gothic"/>
+                <a:ea typeface="Malgun Gothic"/>
+                <a:cs typeface="Malgun Gothic"/>
+              </a:rPr>
+              <a:t>그 밖의 원인도 알아둔다.</a:t>
+            </a:r>
+          </a:p>
         </p:txBody>
       </p:sp>
     </p:spTree>
@@ -12676,7 +13093,7 @@
               </a:spcAft>
             </a:pPr>
             <a:r>
-              <a:rPr sz="1600" b="1" i="0">
+              <a:rPr sz="1800" b="1" i="0">
                 <a:solidFill>
                   <a:srgbClr val="F2B705"/>
                 </a:solidFill>
@@ -12687,37 +13104,26 @@
               <a:t>•  </a:t>
             </a:r>
             <a:r>
-              <a:rPr sz="1600" b="0" i="0">
-                <a:solidFill>
-                  <a:srgbClr val="11202B"/>
-                </a:solidFill>
-                <a:latin typeface="Malgun Gothic"/>
-                <a:ea typeface="Malgun Gothic"/>
-                <a:cs typeface="Malgun Gothic"/>
-              </a:rPr>
-              <a:t>치료에서 </a:t>
-            </a:r>
-            <a:r>
-              <a:rPr sz="1600" b="1" i="0">
-                <a:solidFill>
-                  <a:srgbClr val="11202B"/>
-                </a:solidFill>
-                <a:latin typeface="Malgun Gothic"/>
-                <a:ea typeface="Malgun Gothic"/>
-                <a:cs typeface="Malgun Gothic"/>
-              </a:rPr>
-              <a:t>thiamine을 포도당보다 먼저 투여하는 것</a:t>
-            </a:r>
-            <a:r>
-              <a:rPr sz="1600" b="0" i="0">
-                <a:solidFill>
-                  <a:srgbClr val="11202B"/>
-                </a:solidFill>
-                <a:latin typeface="Malgun Gothic"/>
-                <a:ea typeface="Malgun Gothic"/>
-                <a:cs typeface="Malgun Gothic"/>
-              </a:rPr>
-              <a:t>이 원칙이다. Thiamine은 pyruvate dehydrogenase와 2-oxoglutarate dehydrogenase의 보조인자이며, 만성 알코올 사용 환자는 thiamine이 부족하다. 결핍 상태에서 포도당을 부하하면 Wernicke 뇌증을 유발할 수 있다. 이후 포도당과 생리식염수를 투여하면 insulin 분비가 올라가 지방 분해가 멈추고 ketosis가 해소된다.</a:t>
+              <a:rPr sz="1800" b="1" i="0">
+                <a:solidFill>
+                  <a:srgbClr val="11202B"/>
+                </a:solidFill>
+                <a:latin typeface="Malgun Gothic"/>
+                <a:ea typeface="Malgun Gothic"/>
+                <a:cs typeface="Malgun Gothic"/>
+              </a:rPr>
+              <a:t>SGLT2 억제제</a:t>
+            </a:r>
+            <a:r>
+              <a:rPr sz="1800" b="0" i="0">
+                <a:solidFill>
+                  <a:srgbClr val="11202B"/>
+                </a:solidFill>
+                <a:latin typeface="Malgun Gothic"/>
+                <a:ea typeface="Malgun Gothic"/>
+                <a:cs typeface="Malgun Gothic"/>
+              </a:rPr>
+              <a:t>를 쓰는 환자에서는 혈당이 거의 정상인 상태로 ketoacidosis가 올 수 있다(euglycemic ketoacidosis). 소변 포도당 배출로 혈당이 가려지므로 혈당만 보고 배제하면 놓친다.</a:t>
             </a:r>
           </a:p>
           <a:p>
@@ -12727,7 +13133,7 @@
               </a:spcAft>
             </a:pPr>
             <a:r>
-              <a:rPr sz="1600" b="1" i="0">
+              <a:rPr sz="1800" b="1" i="0">
                 <a:solidFill>
                   <a:srgbClr val="F2B705"/>
                 </a:solidFill>
@@ -12738,15 +13144,26 @@
               <a:t>•  </a:t>
             </a:r>
             <a:r>
-              <a:rPr sz="1600" b="0" i="0">
-                <a:solidFill>
-                  <a:srgbClr val="11202B"/>
-                </a:solidFill>
-                <a:latin typeface="Malgun Gothic"/>
-                <a:ea typeface="Malgun Gothic"/>
-                <a:cs typeface="Malgun Gothic"/>
-              </a:rPr>
-              <a:t>그 밖의 원인도 알아둔다.</a:t>
+              <a:rPr sz="1800" b="1" i="0">
+                <a:solidFill>
+                  <a:srgbClr val="11202B"/>
+                </a:solidFill>
+                <a:latin typeface="Malgun Gothic"/>
+                <a:ea typeface="Malgun Gothic"/>
+                <a:cs typeface="Malgun Gothic"/>
+              </a:rPr>
+              <a:t>임신 후반기</a:t>
+            </a:r>
+            <a:r>
+              <a:rPr sz="1800" b="0" i="0">
+                <a:solidFill>
+                  <a:srgbClr val="11202B"/>
+                </a:solidFill>
+                <a:latin typeface="Malgun Gothic"/>
+                <a:ea typeface="Malgun Gothic"/>
+                <a:cs typeface="Malgun Gothic"/>
+              </a:rPr>
+              <a:t>는 공복 시 ketogenesis가 빠르게 진행되어 상대적으로 낮은 혈당에서도 ketoacidosis가 생길 수 있다.</a:t>
             </a:r>
           </a:p>
           <a:p>
@@ -12756,7 +13173,7 @@
               </a:spcAft>
             </a:pPr>
             <a:r>
-              <a:rPr sz="1600" b="1" i="0">
+              <a:rPr sz="1800" b="1" i="0">
                 <a:solidFill>
                   <a:srgbClr val="F2B705"/>
                 </a:solidFill>
@@ -12767,87 +13184,7 @@
               <a:t>•  </a:t>
             </a:r>
             <a:r>
-              <a:rPr sz="1600" b="1" i="0">
-                <a:solidFill>
-                  <a:srgbClr val="11202B"/>
-                </a:solidFill>
-                <a:latin typeface="Malgun Gothic"/>
-                <a:ea typeface="Malgun Gothic"/>
-                <a:cs typeface="Malgun Gothic"/>
-              </a:rPr>
-              <a:t>SGLT2 억제제</a:t>
-            </a:r>
-            <a:r>
-              <a:rPr sz="1600" b="0" i="0">
-                <a:solidFill>
-                  <a:srgbClr val="11202B"/>
-                </a:solidFill>
-                <a:latin typeface="Malgun Gothic"/>
-                <a:ea typeface="Malgun Gothic"/>
-                <a:cs typeface="Malgun Gothic"/>
-              </a:rPr>
-              <a:t>를 쓰는 환자에서는 혈당이 거의 정상인 상태로 ketoacidosis가 올 수 있다(euglycemic ketoacidosis). 소변 포도당 배출로 혈당이 가려지므로 혈당만 보고 배제하면 놓친다.</a:t>
-            </a:r>
-          </a:p>
-          <a:p>
-            <a:pPr>
-              <a:spcAft>
-                <a:spcPts val="900"/>
-              </a:spcAft>
-            </a:pPr>
-            <a:r>
-              <a:rPr sz="1600" b="1" i="0">
-                <a:solidFill>
-                  <a:srgbClr val="F2B705"/>
-                </a:solidFill>
-                <a:latin typeface="Malgun Gothic"/>
-                <a:ea typeface="Malgun Gothic"/>
-                <a:cs typeface="Malgun Gothic"/>
-              </a:rPr>
-              <a:t>•  </a:t>
-            </a:r>
-            <a:r>
-              <a:rPr sz="1600" b="1" i="0">
-                <a:solidFill>
-                  <a:srgbClr val="11202B"/>
-                </a:solidFill>
-                <a:latin typeface="Malgun Gothic"/>
-                <a:ea typeface="Malgun Gothic"/>
-                <a:cs typeface="Malgun Gothic"/>
-              </a:rPr>
-              <a:t>임신 후반기</a:t>
-            </a:r>
-            <a:r>
-              <a:rPr sz="1600" b="0" i="0">
-                <a:solidFill>
-                  <a:srgbClr val="11202B"/>
-                </a:solidFill>
-                <a:latin typeface="Malgun Gothic"/>
-                <a:ea typeface="Malgun Gothic"/>
-                <a:cs typeface="Malgun Gothic"/>
-              </a:rPr>
-              <a:t>는 공복 시 ketogenesis가 빠르게 진행되어 상대적으로 낮은 혈당에서도 ketoacidosis가 생길 수 있다.</a:t>
-            </a:r>
-          </a:p>
-          <a:p>
-            <a:pPr>
-              <a:spcAft>
-                <a:spcPts val="900"/>
-              </a:spcAft>
-            </a:pPr>
-            <a:r>
-              <a:rPr sz="1600" b="1" i="0">
-                <a:solidFill>
-                  <a:srgbClr val="F2B705"/>
-                </a:solidFill>
-                <a:latin typeface="Malgun Gothic"/>
-                <a:ea typeface="Malgun Gothic"/>
-                <a:cs typeface="Malgun Gothic"/>
-              </a:rPr>
-              <a:t>•  </a:t>
-            </a:r>
-            <a:r>
-              <a:rPr sz="1600" b="1" i="0">
+              <a:rPr sz="1800" b="1" i="0">
                 <a:solidFill>
                   <a:srgbClr val="11202B"/>
                 </a:solidFill>
@@ -12858,7 +13195,7 @@
               <a:t>소아의 공복 ketotic hypoglycemia</a:t>
             </a:r>
             <a:r>
-              <a:rPr sz="1600" b="0" i="0">
+              <a:rPr sz="1800" b="0" i="0">
                 <a:solidFill>
                   <a:srgbClr val="11202B"/>
                 </a:solidFill>
